--- a/docs/Traffic_Oracle_Presentation.pptx
+++ b/docs/Traffic_Oracle_Presentation.pptx
@@ -139,14 +139,14 @@
   <p:extLst>
     <p:ext uri="{521415D9-36F7-43E2-AB2F-B90AF26B5E84}">
       <p14:sectionLst xmlns:p14="http://schemas.microsoft.com/office/powerpoint/2010/main">
-        <p14:section name="Opening" id="{3b8c6710-b3ff-00d5-8f5b-52fae7e3e0d2}">
+        <p14:section name="Opening" id="{6bcd3cb8-ea7f-f1a8-413c-43b9fbaca7ef}">
           <p14:sldIdLst>
             <p14:sldId id="256"/>
             <p14:sldId id="257"/>
             <p14:sldId id="258"/>
           </p14:sldIdLst>
         </p14:section>
-        <p14:section name="01 The data" id="{3816fce1-ead2-44f2-dabf-556beab0ce78}">
+        <p14:section name="01 The data" id="{5e13ab9a-a29b-959b-bcd7-586c390f6233}">
           <p14:sldIdLst>
             <p14:sldId id="259"/>
             <p14:sldId id="260"/>
@@ -156,14 +156,14 @@
             <p14:sldId id="264"/>
           </p14:sldIdLst>
         </p14:section>
-        <p14:section name="02 A fair fight" id="{3c622a37-db7f-4a9d-e833-ef3bf9d4000f}">
+        <p14:section name="02 A fair fight" id="{268f5f2c-4aca-8fe1-e4de-085137692446}">
           <p14:sldIdLst>
             <p14:sldId id="265"/>
             <p14:sldId id="266"/>
             <p14:sldId id="267"/>
           </p14:sldIdLst>
         </p14:section>
-        <p14:section name="03 Trees" id="{08d62247-98c0-e128-fbfb-45e5af3e17fc}">
+        <p14:section name="03 Trees" id="{3d410b73-ee7a-0212-438c-28e34ddd9db2}">
           <p14:sldIdLst>
             <p14:sldId id="268"/>
             <p14:sldId id="269"/>
@@ -171,7 +171,7 @@
             <p14:sldId id="271"/>
           </p14:sldIdLst>
         </p14:section>
-        <p14:section name="04 Graph attention" id="{3851769d-6724-9a27-133a-94c2b243ae99}">
+        <p14:section name="04 Graph attention" id="{85127ce9-2a0c-ee06-6b58-6e81d8689b96}">
           <p14:sldIdLst>
             <p14:sldId id="272"/>
             <p14:sldId id="273"/>
@@ -179,7 +179,7 @@
             <p14:sldId id="275"/>
           </p14:sldIdLst>
         </p14:section>
-        <p14:section name="05 Hybrid" id="{e459f68f-888f-5de7-5716-f9d96c2f0990}">
+        <p14:section name="05 Hybrid" id="{86501ac6-02ab-44dc-6d57-60911c95e17f}">
           <p14:sldIdLst>
             <p14:sldId id="276"/>
             <p14:sldId id="277"/>
@@ -187,7 +187,7 @@
             <p14:sldId id="279"/>
           </p14:sldIdLst>
         </p14:section>
-        <p14:section name="06 Stress tests" id="{3c6af95e-d949-1405-4047-553b01ae1a32}">
+        <p14:section name="06 Stress tests" id="{a4ee2487-d00a-3069-82dc-4aadf656739e}">
           <p14:sldIdLst>
             <p14:sldId id="280"/>
             <p14:sldId id="281"/>
@@ -195,13 +195,13 @@
             <p14:sldId id="283"/>
           </p14:sldIdLst>
         </p14:section>
-        <p14:section name="07 Control" id="{af351ea0-cd51-b921-31c9-795ae7d01c10}">
+        <p14:section name="07 Control" id="{a9974435-8a92-9df9-79ee-fe93df278394}">
           <p14:sldIdLst>
             <p14:sldId id="284"/>
             <p14:sldId id="285"/>
           </p14:sldIdLst>
         </p14:section>
-        <p14:section name="Closing" id="{23ba8595-c690-5311-ff94-5d93cd4bd501}">
+        <p14:section name="Closing" id="{7ee99ca9-1e0d-e9d8-8e08-8ff3b7590126}">
           <p14:sldIdLst>
             <p14:sldId id="286"/>
             <p14:sldId id="287"/>
@@ -21228,7 +21228,7 @@
         <p:spPr>
           <a:xfrm>
             <a:off x="731520" y="3017520"/>
-            <a:ext cx="10058400" cy="1005840"/>
+            <a:ext cx="10058400" cy="1280160"/>
           </a:xfrm>
           <a:prstGeom prst="rect">
             <a:avLst/>
@@ -21278,6 +21278,20 @@
                 </a:solidFill>
               </a:rPr>
               <a:t>github.com/Pranav-Singh-Devloper/traffic-oracle</a:t>
+            </a:r>
+            <a:endParaRPr lang="en-US" sz="1800" dirty="0"/>
+          </a:p>
+          <a:p>
+            <a:pPr indent="0" marL="0">
+              <a:buNone/>
+            </a:pPr>
+            <a:r>
+              <a:rPr lang="en-US" sz="1800" b="1" dirty="0">
+                <a:solidFill>
+                  <a:schemeClr val="accent3"/>
+                </a:solidFill>
+              </a:rPr>
+              <a:t>Live demo: traffic-oracle.streamlit.app</a:t>
             </a:r>
             <a:endParaRPr lang="en-US" sz="1800" dirty="0"/>
           </a:p>
